--- a/slides/Module_05_Testing_CICD.pptx
+++ b/slides/Module_05_Testing_CICD.pptx
@@ -2225,7 +2225,7 @@
                   <a:srgbClr val="FFFFFF"/>
                 </a:solidFill>
               </a:rPr>
-              <a:t>Artefact</a:t>
+              <a:t>Artifact</a:t>
             </a:r>
             <a:endParaRPr lang="en-US" sz="1300" dirty="0"/>
           </a:p>
@@ -3442,7 +3442,7 @@
                   <a:srgbClr val="5B8DB8"/>
                 </a:solidFill>
               </a:rPr>
-              <a:t>Agent review spans all artefacts</a:t>
+              <a:t>Agent review spans all artifacts</a:t>
             </a:r>
             <a:endParaRPr lang="en-US" sz="1200" dirty="0"/>
           </a:p>
@@ -3592,7 +3592,7 @@
                   <a:srgbClr val="D4E4F0"/>
                 </a:solidFill>
               </a:rPr>
-              <a:t>Requiring test coverage on changed files eliminated failure mode 2. Agents could no longer hide wrong behaviour behind passing CI.</a:t>
+              <a:t>Requiring test coverage on changed files eliminated failure mode 2. Agents could no longer hide wrong behavior behind passing CI.</a:t>
             </a:r>
             <a:endParaRPr lang="en-US" sz="1050" dirty="0"/>
           </a:p>
@@ -4026,7 +4026,7 @@
                   <a:srgbClr val="4A7FA8"/>
                 </a:solidFill>
               </a:rPr>
-              <a:t>Define review for 4 artefact types</a:t>
+              <a:t>Define review for 4 artifact types</a:t>
             </a:r>
             <a:endParaRPr lang="en-US" sz="1250" dirty="0"/>
           </a:p>
@@ -4520,7 +4520,7 @@
                   <a:srgbClr val="D4E4F0"/>
                 </a:solidFill>
               </a:rPr>
-              <a:t>Q2.  Which SDLC artefact on your team has never been formally reviewed? What would an agent find if you pointed one at it today?</a:t>
+              <a:t>Q2.  Which SDLC artifact on your team has never been formally reviewed? What would an agent find if you pointed one at it today?</a:t>
             </a:r>
             <a:endParaRPr lang="en-US" sz="1150" dirty="0"/>
           </a:p>
@@ -4683,7 +4683,7 @@
                   <a:srgbClr val="D4E4F0"/>
                 </a:solidFill>
               </a:rPr>
-              <a:t>· Agents review ALL SDLC artefacts, not just code</a:t>
+              <a:t>· Agents review ALL SDLC artifacts, not just code</a:t>
             </a:r>
             <a:endParaRPr lang="en-US" sz="1150" dirty="0"/>
           </a:p>
@@ -5092,7 +5092,7 @@
                   <a:srgbClr val="1C3557"/>
                 </a:solidFill>
               </a:rPr>
-              <a:t>Review Across All SDLC Artefacts</a:t>
+              <a:t>Review Across All SDLC Artifacts</a:t>
             </a:r>
             <a:endParaRPr lang="en-US" sz="1300" dirty="0"/>
           </a:p>
@@ -5128,7 +5128,7 @@
                   <a:srgbClr val="7A90A8"/>
                 </a:solidFill>
               </a:rPr>
-              <a:t>Understand that coding agents are reviewers across ALL artefacts — not just code. PRDs, specs, architecture proposals, docs, and ADRs are all in scope.</a:t>
+              <a:t>Understand that coding agents are reviewers across ALL artifacts — not just code. PRDs, specs, architecture proposals, docs, and ADRs are all in scope.</a:t>
             </a:r>
             <a:endParaRPr lang="en-US" sz="1150" dirty="0"/>
           </a:p>
@@ -5271,7 +5271,7 @@
                   <a:srgbClr val="7A90A8"/>
                 </a:solidFill>
               </a:rPr>
-              <a:t>Apply human-in-the-loop patterns (approval gate, checkpoint, exception escalation, spot check) at the right granularity for each artefact and risk level.</a:t>
+              <a:t>Apply human-in-the-loop patterns (approval gate, checkpoint, exception escalation, spot check) at the right granularity for each artifact and risk level.</a:t>
             </a:r>
             <a:endParaRPr lang="en-US" sz="1150" dirty="0"/>
           </a:p>
@@ -5681,7 +5681,7 @@
                   <a:srgbClr val="7A90A8"/>
                 </a:solidFill>
               </a:rPr>
-              <a:t>Any artefact expressible in text and evaluable against criteria is reviewable by an agent</a:t>
+              <a:t>Any artifact expressible in text and evaluable against criteria is reviewable by an agent</a:t>
             </a:r>
             <a:endParaRPr lang="en-US" sz="1200" dirty="0"/>
           </a:p>
@@ -5737,7 +5737,7 @@
                   <a:srgbClr val="FFFFFF"/>
                 </a:solidFill>
               </a:rPr>
-              <a:t>Artefact</a:t>
+              <a:t>Artifact</a:t>
             </a:r>
             <a:endParaRPr lang="en-US" sz="1150" dirty="0"/>
           </a:p>
